--- a/docs/Таныстырылым_1-аралық_жоба.pptx
+++ b/docs/Таныстырылым_1-аралық_жоба.pptx
@@ -112,28 +112,28 @@
   <p:extLst>
     <p:ext uri="{521415D9-36F7-43E2-AB2F-B90AF26B5E84}">
       <p14:sectionLst xmlns:p14="http://schemas.microsoft.com/office/powerpoint/2010/main">
-        <p14:section name="Кіріспе" id="{7d3c7914-52b3-b6b2-4b75-62454dd5e2b6}">
+        <p14:section name="Кіріспе" id="{9395b6da-7f25-075e-6c90-2d28e53903b3}">
           <p14:sldIdLst>
             <p14:sldId id="256"/>
           </p14:sldIdLst>
         </p14:section>
-        <p14:section name="Зерттеу" id="{ec1b85c4-8625-5898-2b13-8cec76f9595b}">
+        <p14:section name="Зерттеу" id="{10fc6f06-1fc3-0d8e-8e3f-7dce9dc734bd}">
           <p14:sldIdLst>
             <p14:sldId id="257"/>
           </p14:sldIdLst>
         </p14:section>
-        <p14:section name="Қосымша" id="{0b4cabc7-37fa-cadf-e338-93922c65a585}">
+        <p14:section name="Қосымша" id="{69976ae1-6f5c-56e2-5b7f-d167a2830a0d}">
           <p14:sldIdLst>
             <p14:sldId id="258"/>
             <p14:sldId id="259"/>
           </p14:sldIdLst>
         </p14:section>
-        <p14:section name="Нәтижелер" id="{d121c787-ecc9-653e-dd47-d96f043730a0}">
+        <p14:section name="Нәтижелер" id="{9d38c5dd-049b-17c6-f2fa-5de8195484e6}">
           <p14:sldIdLst>
             <p14:sldId id="260"/>
           </p14:sldIdLst>
         </p14:section>
-        <p14:section name="Қорытынды" id="{c0cee339-4461-6ad6-a5da-5bd5bba8c701}">
+        <p14:section name="Қорытынды" id="{7f51b1db-0263-4259-09be-1b82297802a9}">
           <p14:sldIdLst>
             <p14:sldId id="261"/>
           </p14:sldIdLst>
@@ -2447,38 +2447,7 @@
                   <a:srgbClr val="C9D0DE"/>
                 </a:solidFill>
               </a:rPr>
-              <a:t>Магистрант: </a:t>
-            </a:r>
-            <a:pPr indent="0" marL="0">
-              <a:spcAft>
-                <a:spcPts val="400"/>
-              </a:spcAft>
-              <a:buNone/>
-            </a:pPr>
-            <a:r>
-              <a:rPr lang="en-US" sz="1400" dirty="0">
-                <a:solidFill>
-                  <a:srgbClr val="1B2130"/>
-                </a:solidFill>
-                <a:highlight>
-                  <a:srgbClr val="FFFF00"/>
-                </a:highlight>
-              </a:rPr>
-              <a:t>[аты-жөні]</a:t>
-            </a:r>
-            <a:pPr indent="0" marL="0">
-              <a:spcAft>
-                <a:spcPts val="400"/>
-              </a:spcAft>
-              <a:buNone/>
-            </a:pPr>
-            <a:r>
-              <a:rPr lang="en-US" sz="1400" dirty="0">
-                <a:solidFill>
-                  <a:srgbClr val="C9D0DE"/>
-                </a:solidFill>
-              </a:rPr>
-              <a:t> · 7М01511 – Информатика · 2026</a:t>
+              <a:t>Магистрант: Касым Сагынгали · 7М01511 – Информатика · 2026</a:t>
             </a:r>
             <a:endParaRPr lang="en-US" sz="1400" dirty="0"/>
           </a:p>
@@ -5071,21 +5040,22 @@
               <a:t>Қосымша: </a:t>
             </a:r>
             <a:pPr indent="0" marL="0">
-              <a:spcAft>
-                <a:spcPts val="400"/>
-              </a:spcAft>
-              <a:buNone/>
-            </a:pPr>
-            <a:r>
-              <a:rPr lang="en-US" sz="1400" dirty="0">
-                <a:solidFill>
-                  <a:srgbClr val="1B2130"/>
-                </a:solidFill>
-                <a:highlight>
-                  <a:srgbClr val="FFFF00"/>
-                </a:highlight>
-              </a:rPr>
-              <a:t>[сілтеме]</a:t>
+              <a:buNone/>
+            </a:pPr>
+            <a:r>
+              <a:rPr lang="en-US" sz="1400" u="sng" dirty="0">
+                <a:solidFill>
+                  <a:srgbClr val="F0C419"/>
+                </a:solidFill>
+                <a:hlinkClick r:id="rId1" invalidUrl="" action="" tgtFrame="" tooltip="" history="1" highlightClick="0" endSnd="0">
+                  <a:extLst>
+                    <a:ext uri="{A12FA001-AC4F-418D-AE19-62706E023703}">
+                      <ahyp:hlinkClr xmlns:ahyp="http://schemas.microsoft.com/office/drawing/2018/hyperlinkcolor" val="tx"/>
+                    </a:ext>
+                  </a:extLst>
+                </a:hlinkClick>
+              </a:rPr>
+              <a:t>js-talimger.onrender.com</a:t>
             </a:r>
             <a:pPr indent="0" marL="0">
               <a:buNone/>
@@ -5099,21 +5069,22 @@
               <a:t>    Код: </a:t>
             </a:r>
             <a:pPr indent="0" marL="0">
-              <a:spcAft>
-                <a:spcPts val="400"/>
-              </a:spcAft>
-              <a:buNone/>
-            </a:pPr>
-            <a:r>
-              <a:rPr lang="en-US" sz="1400" dirty="0">
-                <a:solidFill>
-                  <a:srgbClr val="1B2130"/>
-                </a:solidFill>
-                <a:highlight>
-                  <a:srgbClr val="FFFF00"/>
-                </a:highlight>
-              </a:rPr>
-              <a:t>[GitHub сілтемесі]</a:t>
+              <a:buNone/>
+            </a:pPr>
+            <a:r>
+              <a:rPr lang="en-US" sz="1400" u="sng" dirty="0">
+                <a:solidFill>
+                  <a:srgbClr val="F0C419"/>
+                </a:solidFill>
+                <a:hlinkClick r:id="rId2" invalidUrl="" action="" tgtFrame="" tooltip="" history="1" highlightClick="0" endSnd="0">
+                  <a:extLst>
+                    <a:ext uri="{A12FA001-AC4F-418D-AE19-62706E023703}">
+                      <ahyp:hlinkClr xmlns:ahyp="http://schemas.microsoft.com/office/drawing/2018/hyperlinkcolor" val="tx"/>
+                    </a:ext>
+                  </a:extLst>
+                </a:hlinkClick>
+              </a:rPr>
+              <a:t>github.com/FallAnge1/js-talimger</a:t>
             </a:r>
             <a:endParaRPr lang="en-US" sz="1400" dirty="0"/>
           </a:p>

--- a/docs/Таныстырылым_1-аралық_жоба.pptx
+++ b/docs/Таныстырылым_1-аралық_жоба.pptx
@@ -11,9 +11,10 @@
     <p:sldId id="259" r:id="rId5"/>
     <p:sldId id="260" r:id="rId6"/>
     <p:sldId id="261" r:id="rId7"/>
+    <p:sldId id="262" r:id="rId8"/>
   </p:sldIdLst>
   <p:notesMasterIdLst>
-    <p:notesMasterId r:id="rId8"/>
+    <p:notesMasterId r:id="rId9"/>
   </p:notesMasterIdLst>
   <p:sldSz cx="9144000" cy="5143500"/>
   <p:notesSz cx="5143500" cy="9144000"/>
@@ -112,30 +113,31 @@
   <p:extLst>
     <p:ext uri="{521415D9-36F7-43E2-AB2F-B90AF26B5E84}">
       <p14:sectionLst xmlns:p14="http://schemas.microsoft.com/office/powerpoint/2010/main">
-        <p14:section name="Кіріспе" id="{9395b6da-7f25-075e-6c90-2d28e53903b3}">
+        <p14:section name="Кіріспе" id="{191b651f-71ab-97ab-f0c7-b87d1d805cc2}">
           <p14:sldIdLst>
             <p14:sldId id="256"/>
           </p14:sldIdLst>
         </p14:section>
-        <p14:section name="Зерттеу" id="{10fc6f06-1fc3-0d8e-8e3f-7dce9dc734bd}">
+        <p14:section name="Зерттеу" id="{394efa51-5268-ab22-24b7-894d97082904}">
           <p14:sldIdLst>
             <p14:sldId id="257"/>
           </p14:sldIdLst>
         </p14:section>
-        <p14:section name="Қосымша" id="{69976ae1-6f5c-56e2-5b7f-d167a2830a0d}">
+        <p14:section name="Қосымша" id="{879ae49a-d686-f3af-7aa3-31bea4e38f3f}">
           <p14:sldIdLst>
             <p14:sldId id="258"/>
             <p14:sldId id="259"/>
-          </p14:sldIdLst>
-        </p14:section>
-        <p14:section name="Нәтижелер" id="{9d38c5dd-049b-17c6-f2fa-5de8195484e6}">
-          <p14:sldIdLst>
             <p14:sldId id="260"/>
           </p14:sldIdLst>
         </p14:section>
-        <p14:section name="Қорытынды" id="{7f51b1db-0263-4259-09be-1b82297802a9}">
+        <p14:section name="Нәтижелер" id="{4a11d86c-ea4e-6934-88f8-43137a0eeb92}">
           <p14:sldIdLst>
             <p14:sldId id="261"/>
+          </p14:sldIdLst>
+        </p14:section>
+        <p14:section name="Қорытынды" id="{a6690735-c9bb-9f57-a9f0-583d361635a9}">
+          <p14:sldIdLst>
+            <p14:sldId id="262"/>
           </p14:sldIdLst>
         </p14:section>
       </p14:sectionLst>
@@ -1398,7 +1400,7 @@
           <a:p>
             <a:r>
               <a:rPr lang="en-US" dirty="0"/>
-              <a:t>Техникалық сынақтың барлық жағдайлары автотесттермен тексерілді: 16 тесттің 16-сы өтті. ЖИ сапасын тексеру үшін 14 модельдік жауап дайындадым: дұрыс, жартылай дұрыс, қате, нұсқау енгізу әрекеті және рубрикаға тура келмейтін төрт даулы жауап. Педагог бағасын ЖИ нәтижесін көрмей тұрып қойдым. Типтік жауаптарда бағалар толық сәйкес келді, ЖИ max = 0 сияқты мағыналық қателерді де тапты және нұсқау енгізуге көнбеді. Айырмашылық тек даулы жауаптарда болды: ЖИ рубриканы сөзбе-сөз қолданып, sort, reduce, onclick сияқты баламалы шешімдерді төмен бағалады және needs_review белгісін қоймады. Сондықтан сұраныстың v2 нұсқасын жасадым, ал барлық ЖИ нәтижесі педагог тексергенге дейін тексерілмеген деп белгіленеді.</a:t>
+              <a:t>Қосымша функция — қатемен жұмыс. Кері байланысты алған соң қатысушы кодын тағы екі рет түзетіп жібере алады, ЖИ әр талпынысты рубрика бойынша қайта бағалайды. Түсінбесе, ЖИ-ден дайын шешімсіз бағыттаушы кеңес сұрайды — бір тапсырмаға екі рет. Мысалда бірінші талпыныс 5 балл болды, кеңестен кейін қате түзетіліп, 8 балл алынды. Бастапқы жауап өзгермейді, сондықтан талпыныстар арасындағы балл өсімін зерттеу деректері ретінде талдауға болады.</a:t>
             </a:r>
             <a:endParaRPr lang="en-US" dirty="0"/>
           </a:p>
@@ -1486,7 +1488,7 @@
           <a:p>
             <a:r>
               <a:rPr lang="en-US" dirty="0"/>
-              <a:t>Қорытынды: зерттеу міндетін шешетін, деректерді бұлтта сақтайтын және ЖИ кері байланысын педагог бақылауымен беретін қосымша жасалды. Шектеулері — код орындалмайды, тегін API лимиттері бар, әзірге модельдік деректер аз. Келесі қадам — пилоттық тексеру және 2-аралық жобаға педагог тексерген деректерді жинау. Назарларыңызға рахмет.</a:t>
+              <a:t>Техникалық сынақтың барлық жағдайлары автотесттермен тексерілді: 16 тесттің 16-сы өтті. ЖИ сапасын тексеру үшін 14 модельдік жауап дайындадым: дұрыс, жартылай дұрыс, қате, нұсқау енгізу әрекеті және рубрикаға тура келмейтін төрт даулы жауап. Педагог бағасын ЖИ нәтижесін көрмей тұрып қойдым. Типтік жауаптарда бағалар толық сәйкес келді, ЖИ max = 0 сияқты мағыналық қателерді де тапты және нұсқау енгізуге көнбеді. Айырмашылық тек даулы жауаптарда болды: ЖИ рубриканы сөзбе-сөз қолданып, sort, reduce, onclick сияқты баламалы шешімдерді төмен бағалады және needs_review белгісін қоймады. Сондықтан сұраныстың v2 нұсқасын жасадым, ал барлық ЖИ нәтижесі педагог тексергенге дейін тексерілмеген деп белгіленеді.</a:t>
             </a:r>
             <a:endParaRPr lang="en-US" dirty="0"/>
           </a:p>
@@ -1510,6 +1512,94 @@
             <a:fld id="{F7021451-1387-4CA6-816F-3879F97B5CBC}" type="slidenum">
               <a:rPr lang="en-US"/>
               <a:t>6</a:t>
+            </a:fld>
+            <a:endParaRPr lang="en-US"/>
+          </a:p>
+        </p:txBody>
+      </p:sp>
+    </p:spTree>
+    <p:extLst>
+      <p:ext uri="{BB962C8B-B14F-4D97-AF65-F5344CB8AC3E}">
+        <p14:creationId xmlns:p14="http://schemas.microsoft.com/office/powerpoint/2010/main" val="1024086991"/>
+      </p:ext>
+    </p:extLst>
+  </p:cSld>
+  <p:clrMapOvr>
+    <a:masterClrMapping/>
+  </p:clrMapOvr>
+</p:notes>
+</file>
+
+<file path=ppt/notesSlides/notesSlide7.xml><?xml version="1.0" encoding="utf-8"?>
+<p:notes xmlns:a="http://schemas.openxmlformats.org/drawingml/2006/main" xmlns:r="http://schemas.openxmlformats.org/officeDocument/2006/relationships" xmlns:p="http://schemas.openxmlformats.org/presentationml/2006/main">
+  <p:cSld>
+    <p:spTree>
+      <p:nvGrpSpPr>
+        <p:cNvPr id="1" name=""/>
+        <p:cNvGrpSpPr/>
+        <p:nvPr/>
+      </p:nvGrpSpPr>
+      <p:grpSpPr>
+        <a:xfrm>
+          <a:off x="0" y="0"/>
+          <a:ext cx="0" cy="0"/>
+          <a:chOff x="0" y="0"/>
+          <a:chExt cx="0" cy="0"/>
+        </a:xfrm>
+      </p:grpSpPr>
+      <p:sp>
+        <p:nvSpPr>
+          <p:cNvPr id="2" name="Slide Image Placeholder 1"/>
+          <p:cNvSpPr>
+            <a:spLocks noGrp="1" noRot="1" noChangeAspect="1"/>
+          </p:cNvSpPr>
+          <p:nvPr>
+            <p:ph type="sldImg"/>
+          </p:nvPr>
+        </p:nvSpPr>
+        <p:spPr/>
+      </p:sp>
+      <p:sp>
+        <p:nvSpPr>
+          <p:cNvPr id="3" name="Notes Placeholder 2"/>
+          <p:cNvSpPr>
+            <a:spLocks noGrp="1"/>
+          </p:cNvSpPr>
+          <p:nvPr>
+            <p:ph type="body" idx="1"/>
+          </p:nvPr>
+        </p:nvSpPr>
+        <p:spPr/>
+        <p:txBody>
+          <a:bodyPr/>
+          <a:lstStyle/>
+          <a:p>
+            <a:r>
+              <a:rPr lang="en-US" dirty="0"/>
+              <a:t>Қорытынды: зерттеу міндетін шешетін, деректерді бұлтта сақтайтын және ЖИ кері байланысын педагог бақылауымен беретін қосымша жасалды. Шектеулері — код орындалмайды, тегін API лимиттері бар, әзірге модельдік деректер аз. Келесі қадам — пилоттық тексеру және 2-аралық жобаға педагог тексерген деректерді жинау. Назарларыңызға рахмет.</a:t>
+            </a:r>
+            <a:endParaRPr lang="en-US" dirty="0"/>
+          </a:p>
+        </p:txBody>
+      </p:sp>
+      <p:sp>
+        <p:nvSpPr>
+          <p:cNvPr id="4" name="Slide Number Placeholder 3"/>
+          <p:cNvSpPr>
+            <a:spLocks noGrp="1"/>
+          </p:cNvSpPr>
+          <p:nvPr>
+            <p:ph type="sldNum" sz="quarter" idx="10"/>
+          </p:nvPr>
+        </p:nvSpPr>
+        <p:spPr/>
+        <p:txBody>
+          <a:bodyPr/>
+          <a:lstStyle/>
+          <a:p>
+            <a:fld id="{F7021451-1387-4CA6-816F-3879F97B5CBC}" type="slidenum">
+              <a:rPr lang="en-US"/>
+              <a:t>7</a:t>
             </a:fld>
             <a:endParaRPr lang="en-US"/>
           </a:p>
@@ -4217,44 +4307,113 @@
                   <a:schemeClr val="tx1"/>
                 </a:solidFill>
               </a:rPr>
-              <a:t>Сынақ нәтижелері</a:t>
+              <a:t>Қатемен жұмыс: кеңес және қайта тексеру</a:t>
             </a:r>
             <a:endParaRPr lang="en-US" sz="3000" dirty="0"/>
           </a:p>
         </p:txBody>
       </p:sp>
-      <p:sp>
-        <p:nvSpPr>
-          <p:cNvPr id="3" name="tech-card"/>
+      <p:pic>
+        <p:nvPicPr>
+          <p:cNvPr id="3" name="revision-screen" descr="Кері байланыс беті: 1-талпыныс 5/8, 2-талпыныс 8/8, ЖИ кеңесшісі">    </p:cNvPr>
+          <p:cNvPicPr>
+            <a:picLocks noChangeAspect="1"/>
+          </p:cNvPicPr>
+          <p:nvPr/>
+        </p:nvPicPr>
+        <p:blipFill>
+          <a:blip r:embed="rId1"/>
+          <a:stretch>
+            <a:fillRect/>
+          </a:stretch>
+        </p:blipFill>
+        <p:spPr>
+          <a:xfrm>
+            <a:off x="457200" y="1051560"/>
+            <a:ext cx="5074920" cy="3108960"/>
+          </a:xfrm>
+          <a:prstGeom prst="rect">
+            <a:avLst/>
+          </a:prstGeom>
+        </p:spPr>
+      </p:pic>
+      <p:sp>
+        <p:nvSpPr>
+          <p:cNvPr id="4" name="revision-frame"/>
           <p:cNvSpPr/>
           <p:nvPr/>
         </p:nvSpPr>
         <p:spPr>
           <a:xfrm>
-            <a:off x="457200" y="1097280"/>
-            <a:ext cx="3017520" cy="3429000"/>
+            <a:off x="457200" y="1051560"/>
+            <a:ext cx="5074920" cy="3108960"/>
           </a:xfrm>
           <a:prstGeom prst="roundRect">
             <a:avLst>
-              <a:gd name="adj" fmla="val 3030"/>
+              <a:gd name="adj" fmla="val 1765"/>
             </a:avLst>
           </a:prstGeom>
+          <a:ln w="12700">
+            <a:solidFill>
+              <a:srgbClr val="E2E8F0"/>
+            </a:solidFill>
+            <a:prstDash val="solid"/>
+          </a:ln>
+        </p:spPr>
+      </p:sp>
+      <p:sp>
+        <p:nvSpPr>
+          <p:cNvPr id="5" name="rev-badge-0"/>
+          <p:cNvSpPr txBox="1"/>
+          <p:nvPr/>
+        </p:nvSpPr>
+        <p:spPr>
+          <a:xfrm>
+            <a:off x="5806440" y="1097280"/>
+            <a:ext cx="384048" cy="384048"/>
+          </a:xfrm>
+          <a:prstGeom prst="roundRect">
+            <a:avLst>
+              <a:gd name="adj" fmla="val 19048"/>
+            </a:avLst>
+          </a:prstGeom>
           <a:solidFill>
-            <a:srgbClr val="F3F5F9"/>
+            <a:schemeClr val="accent1"/>
           </a:solidFill>
           <a:ln/>
         </p:spPr>
-      </p:sp>
-      <p:sp>
-        <p:nvSpPr>
-          <p:cNvPr id="4" name="tech-num"/>
+        <p:txBody>
+          <a:bodyPr wrap="square" lIns="0" tIns="0" rIns="0" bIns="0" rtlCol="0" anchor="ctr"/>
+          <a:lstStyle/>
+          <a:p>
+            <a:pPr algn="ctr" indent="0" marL="0">
+              <a:buNone/>
+            </a:pPr>
+            <a:r>
+              <a:rPr lang="en-US" sz="1400" b="1" dirty="0">
+                <a:solidFill>
+                  <a:schemeClr val="tx1"/>
+                </a:solidFill>
+                <a:latin typeface="Calibri" pitchFamily="34" charset="0"/>
+                <a:ea typeface="Calibri" pitchFamily="34" charset="-122"/>
+                <a:cs typeface="Calibri" pitchFamily="34" charset="-120"/>
+              </a:rPr>
+              <a:t>1</a:t>
+            </a:r>
+            <a:endParaRPr lang="en-US" sz="1400" dirty="0"/>
+          </a:p>
+        </p:txBody>
+      </p:sp>
+      <p:sp>
+        <p:nvSpPr>
+          <p:cNvPr id="6" name="rev-text-0"/>
           <p:cNvSpPr txBox="1"/>
           <p:nvPr/>
         </p:nvSpPr>
         <p:spPr>
           <a:xfrm>
-            <a:off x="640080" y="1234440"/>
-            <a:ext cx="2651760" cy="868680"/>
+            <a:off x="6309360" y="1051560"/>
+            <a:ext cx="2377440" cy="749808"/>
           </a:xfrm>
           <a:prstGeom prst="rect">
             <a:avLst/>
@@ -4263,37 +4422,184 @@
           <a:ln/>
         </p:spPr>
         <p:txBody>
+          <a:bodyPr wrap="square" lIns="0" tIns="0" rIns="0" bIns="0" rtlCol="0" anchor="t"/>
+          <a:lstStyle/>
+          <a:p>
+            <a:pPr indent="0" marL="0">
+              <a:buNone/>
+            </a:pPr>
+            <a:r>
+              <a:rPr lang="en-US" sz="1400" b="1" dirty="0">
+                <a:solidFill>
+                  <a:schemeClr val="tx1"/>
+                </a:solidFill>
+              </a:rPr>
+              <a:t>Түзету — 2 рет</a:t>
+            </a:r>
+            <a:endParaRPr lang="en-US" sz="1400" dirty="0"/>
+          </a:p>
+          <a:p>
+            <a:pPr indent="0" marL="0">
+              <a:buNone/>
+            </a:pPr>
+            <a:r>
+              <a:rPr lang="en-US" sz="1200" dirty="0">
+                <a:solidFill>
+                  <a:schemeClr val="tx2"/>
+                </a:solidFill>
+              </a:rPr>
+              <a:t>Кері байланысқа сүйеніп кодты түзетеді, ЖИ рубрика бойынша қайта бағалайды</a:t>
+            </a:r>
+            <a:endParaRPr lang="en-US" sz="1400" dirty="0"/>
+          </a:p>
+        </p:txBody>
+      </p:sp>
+      <p:sp>
+        <p:nvSpPr>
+          <p:cNvPr id="7" name="rev-badge-1"/>
+          <p:cNvSpPr txBox="1"/>
+          <p:nvPr/>
+        </p:nvSpPr>
+        <p:spPr>
+          <a:xfrm>
+            <a:off x="5806440" y="1920240"/>
+            <a:ext cx="384048" cy="384048"/>
+          </a:xfrm>
+          <a:prstGeom prst="roundRect">
+            <a:avLst>
+              <a:gd name="adj" fmla="val 19048"/>
+            </a:avLst>
+          </a:prstGeom>
+          <a:solidFill>
+            <a:schemeClr val="accent1"/>
+          </a:solidFill>
+          <a:ln/>
+        </p:spPr>
+        <p:txBody>
           <a:bodyPr wrap="square" lIns="0" tIns="0" rIns="0" bIns="0" rtlCol="0" anchor="ctr"/>
           <a:lstStyle/>
           <a:p>
+            <a:pPr algn="ctr" indent="0" marL="0">
+              <a:buNone/>
+            </a:pPr>
+            <a:r>
+              <a:rPr lang="en-US" sz="1400" b="1" dirty="0">
+                <a:solidFill>
+                  <a:schemeClr val="tx1"/>
+                </a:solidFill>
+                <a:latin typeface="Calibri" pitchFamily="34" charset="0"/>
+                <a:ea typeface="Calibri" pitchFamily="34" charset="-122"/>
+                <a:cs typeface="Calibri" pitchFamily="34" charset="-120"/>
+              </a:rPr>
+              <a:t>2</a:t>
+            </a:r>
+            <a:endParaRPr lang="en-US" sz="1400" dirty="0"/>
+          </a:p>
+        </p:txBody>
+      </p:sp>
+      <p:sp>
+        <p:nvSpPr>
+          <p:cNvPr id="8" name="rev-text-1"/>
+          <p:cNvSpPr txBox="1"/>
+          <p:nvPr/>
+        </p:nvSpPr>
+        <p:spPr>
+          <a:xfrm>
+            <a:off x="6309360" y="1874520"/>
+            <a:ext cx="2377440" cy="749808"/>
+          </a:xfrm>
+          <a:prstGeom prst="rect">
+            <a:avLst/>
+          </a:prstGeom>
+          <a:noFill/>
+          <a:ln/>
+        </p:spPr>
+        <p:txBody>
+          <a:bodyPr wrap="square" lIns="0" tIns="0" rIns="0" bIns="0" rtlCol="0" anchor="t"/>
+          <a:lstStyle/>
+          <a:p>
             <a:pPr indent="0" marL="0">
               <a:buNone/>
             </a:pPr>
             <a:r>
-              <a:rPr lang="en-US" sz="4800" b="1" dirty="0">
-                <a:solidFill>
-                  <a:schemeClr val="accent3"/>
-                </a:solidFill>
-                <a:latin typeface="Cambria" pitchFamily="34" charset="0"/>
-                <a:ea typeface="Cambria" pitchFamily="34" charset="-122"/>
-                <a:cs typeface="Cambria" pitchFamily="34" charset="-120"/>
-              </a:rPr>
-              <a:t>16/16</a:t>
-            </a:r>
-            <a:endParaRPr lang="en-US" sz="4800" dirty="0"/>
-          </a:p>
-        </p:txBody>
-      </p:sp>
-      <p:sp>
-        <p:nvSpPr>
-          <p:cNvPr id="5" name="tech-list"/>
+              <a:rPr lang="en-US" sz="1400" b="1" dirty="0">
+                <a:solidFill>
+                  <a:schemeClr val="tx1"/>
+                </a:solidFill>
+              </a:rPr>
+              <a:t>ЖИ кеңесі — 2 рет</a:t>
+            </a:r>
+            <a:endParaRPr lang="en-US" sz="1400" dirty="0"/>
+          </a:p>
+          <a:p>
+            <a:pPr indent="0" marL="0">
+              <a:buNone/>
+            </a:pPr>
+            <a:r>
+              <a:rPr lang="en-US" sz="1200" dirty="0">
+                <a:solidFill>
+                  <a:schemeClr val="tx2"/>
+                </a:solidFill>
+              </a:rPr>
+              <a:t>Дайын шешімсіз бағыттаушы кеңес; өз сұрағын қоюға болады</a:t>
+            </a:r>
+            <a:endParaRPr lang="en-US" sz="1400" dirty="0"/>
+          </a:p>
+        </p:txBody>
+      </p:sp>
+      <p:sp>
+        <p:nvSpPr>
+          <p:cNvPr id="9" name="rev-badge-2"/>
           <p:cNvSpPr txBox="1"/>
           <p:nvPr/>
         </p:nvSpPr>
         <p:spPr>
           <a:xfrm>
-            <a:off x="640080" y="2148840"/>
-            <a:ext cx="2697480" cy="2286000"/>
+            <a:off x="5806440" y="2743200"/>
+            <a:ext cx="384048" cy="384048"/>
+          </a:xfrm>
+          <a:prstGeom prst="roundRect">
+            <a:avLst>
+              <a:gd name="adj" fmla="val 19048"/>
+            </a:avLst>
+          </a:prstGeom>
+          <a:solidFill>
+            <a:schemeClr val="accent1"/>
+          </a:solidFill>
+          <a:ln/>
+        </p:spPr>
+        <p:txBody>
+          <a:bodyPr wrap="square" lIns="0" tIns="0" rIns="0" bIns="0" rtlCol="0" anchor="ctr"/>
+          <a:lstStyle/>
+          <a:p>
+            <a:pPr algn="ctr" indent="0" marL="0">
+              <a:buNone/>
+            </a:pPr>
+            <a:r>
+              <a:rPr lang="en-US" sz="1400" b="1" dirty="0">
+                <a:solidFill>
+                  <a:schemeClr val="tx1"/>
+                </a:solidFill>
+                <a:latin typeface="Calibri" pitchFamily="34" charset="0"/>
+                <a:ea typeface="Calibri" pitchFamily="34" charset="-122"/>
+                <a:cs typeface="Calibri" pitchFamily="34" charset="-120"/>
+              </a:rPr>
+              <a:t>3</a:t>
+            </a:r>
+            <a:endParaRPr lang="en-US" sz="1400" dirty="0"/>
+          </a:p>
+        </p:txBody>
+      </p:sp>
+      <p:sp>
+        <p:nvSpPr>
+          <p:cNvPr id="10" name="rev-text-2"/>
+          <p:cNvSpPr txBox="1"/>
+          <p:nvPr/>
+        </p:nvSpPr>
+        <p:spPr>
+          <a:xfrm>
+            <a:off x="6309360" y="2697480"/>
+            <a:ext cx="2377440" cy="749808"/>
           </a:xfrm>
           <a:prstGeom prst="rect">
             <a:avLst/>
@@ -4306,9 +4612,6 @@
           <a:lstStyle/>
           <a:p>
             <a:pPr indent="0" marL="0">
-              <a:spcAft>
-                <a:spcPts val="400"/>
-              </a:spcAft>
               <a:buNone/>
             </a:pPr>
             <a:r>
@@ -4317,165 +4620,116 @@
                   <a:schemeClr val="tx1"/>
                 </a:solidFill>
               </a:rPr>
-              <a:t>техникалық сынақ өтті</a:t>
+              <a:t>Балл өсімі өлшенеді</a:t>
             </a:r>
             <a:endParaRPr lang="en-US" sz="1400" dirty="0"/>
           </a:p>
           <a:p>
-            <a:pPr marL="342900" indent="-342900">
-              <a:spcAft>
-                <a:spcPts val="400"/>
-              </a:spcAft>
-              <a:buSzPct val="100000"/>
-              <a:buChar char="•"/>
-            </a:pPr>
-            <a:r>
-              <a:rPr lang="en-US" sz="1400" dirty="0">
+            <a:pPr indent="0" marL="0">
+              <a:buNone/>
+            </a:pPr>
+            <a:r>
+              <a:rPr lang="en-US" sz="1200" dirty="0">
                 <a:solidFill>
                   <a:schemeClr val="tx2"/>
                 </a:solidFill>
               </a:rPr>
-              <a:t>дұрыс және бос жауап</a:t>
+              <a:t>1-талпыныс → соңғы: кері байланыстың оқуға әсері</a:t>
             </a:r>
             <a:endParaRPr lang="en-US" sz="1400" dirty="0"/>
           </a:p>
-          <a:p>
-            <a:pPr marL="342900" indent="-342900">
-              <a:spcAft>
-                <a:spcPts val="400"/>
-              </a:spcAft>
-              <a:buSzPct val="100000"/>
-              <a:buChar char="•"/>
-            </a:pPr>
-            <a:r>
-              <a:rPr lang="en-US" sz="1400" dirty="0">
+        </p:txBody>
+      </p:sp>
+      <p:sp>
+        <p:nvSpPr>
+          <p:cNvPr id="11" name="rev-badge-3"/>
+          <p:cNvSpPr txBox="1"/>
+          <p:nvPr/>
+        </p:nvSpPr>
+        <p:spPr>
+          <a:xfrm>
+            <a:off x="5806440" y="3566160"/>
+            <a:ext cx="384048" cy="384048"/>
+          </a:xfrm>
+          <a:prstGeom prst="roundRect">
+            <a:avLst>
+              <a:gd name="adj" fmla="val 19048"/>
+            </a:avLst>
+          </a:prstGeom>
+          <a:solidFill>
+            <a:schemeClr val="accent1"/>
+          </a:solidFill>
+          <a:ln/>
+        </p:spPr>
+        <p:txBody>
+          <a:bodyPr wrap="square" lIns="0" tIns="0" rIns="0" bIns="0" rtlCol="0" anchor="ctr"/>
+          <a:lstStyle/>
+          <a:p>
+            <a:pPr algn="ctr" indent="0" marL="0">
+              <a:buNone/>
+            </a:pPr>
+            <a:r>
+              <a:rPr lang="en-US" sz="1400" b="1" dirty="0">
+                <a:solidFill>
+                  <a:schemeClr val="tx1"/>
+                </a:solidFill>
+                <a:latin typeface="Calibri" pitchFamily="34" charset="0"/>
+                <a:ea typeface="Calibri" pitchFamily="34" charset="-122"/>
+                <a:cs typeface="Calibri" pitchFamily="34" charset="-120"/>
+              </a:rPr>
+              <a:t>4</a:t>
+            </a:r>
+            <a:endParaRPr lang="en-US" sz="1400" dirty="0"/>
+          </a:p>
+        </p:txBody>
+      </p:sp>
+      <p:sp>
+        <p:nvSpPr>
+          <p:cNvPr id="12" name="rev-text-3"/>
+          <p:cNvSpPr txBox="1"/>
+          <p:nvPr/>
+        </p:nvSpPr>
+        <p:spPr>
+          <a:xfrm>
+            <a:off x="6309360" y="3520440"/>
+            <a:ext cx="2377440" cy="749808"/>
+          </a:xfrm>
+          <a:prstGeom prst="rect">
+            <a:avLst/>
+          </a:prstGeom>
+          <a:noFill/>
+          <a:ln/>
+        </p:spPr>
+        <p:txBody>
+          <a:bodyPr wrap="square" lIns="0" tIns="0" rIns="0" bIns="0" rtlCol="0" anchor="t"/>
+          <a:lstStyle/>
+          <a:p>
+            <a:pPr indent="0" marL="0">
+              <a:buNone/>
+            </a:pPr>
+            <a:r>
+              <a:rPr lang="en-US" sz="1400" b="1" dirty="0">
+                <a:solidFill>
+                  <a:schemeClr val="tx1"/>
+                </a:solidFill>
+              </a:rPr>
+              <a:t>Деректер бөлек</a:t>
+            </a:r>
+            <a:endParaRPr lang="en-US" sz="1400" dirty="0"/>
+          </a:p>
+          <a:p>
+            <a:pPr indent="0" marL="0">
+              <a:buNone/>
+            </a:pPr>
+            <a:r>
+              <a:rPr lang="en-US" sz="1200" dirty="0">
                 <a:solidFill>
                   <a:schemeClr val="tx2"/>
                 </a:solidFill>
               </a:rPr>
-              <a:t>API қатесі, қайта жіберу</a:t>
+              <a:t>Бастапқы жауап өзгермейді; әр талпынысты педагог тексереді</a:t>
             </a:r>
             <a:endParaRPr lang="en-US" sz="1400" dirty="0"/>
-          </a:p>
-          <a:p>
-            <a:pPr marL="342900" indent="-342900">
-              <a:spcAft>
-                <a:spcPts val="400"/>
-              </a:spcAft>
-              <a:buSzPct val="100000"/>
-              <a:buChar char="•"/>
-            </a:pPr>
-            <a:r>
-              <a:rPr lang="en-US" sz="1400" dirty="0">
-                <a:solidFill>
-                  <a:schemeClr val="tx2"/>
-                </a:solidFill>
-              </a:rPr>
-              <a:t>бұзылған JSON, балл аралығы</a:t>
-            </a:r>
-            <a:endParaRPr lang="en-US" sz="1400" dirty="0"/>
-          </a:p>
-          <a:p>
-            <a:pPr marL="342900" indent="-342900">
-              <a:spcAft>
-                <a:spcPts val="400"/>
-              </a:spcAft>
-              <a:buSzPct val="100000"/>
-              <a:buChar char="•"/>
-            </a:pPr>
-            <a:r>
-              <a:rPr lang="en-US" sz="1400" dirty="0">
-                <a:solidFill>
-                  <a:schemeClr val="tx2"/>
-                </a:solidFill>
-              </a:rPr>
-              <a:t>рұқсатсыз кіру, CSV экспорт</a:t>
-            </a:r>
-            <a:endParaRPr lang="en-US" sz="1400" dirty="0"/>
-          </a:p>
-          <a:p>
-            <a:pPr marL="342900" indent="-342900">
-              <a:spcAft>
-                <a:spcPts val="400"/>
-              </a:spcAft>
-              <a:buSzPct val="100000"/>
-              <a:buChar char="•"/>
-            </a:pPr>
-            <a:r>
-              <a:rPr lang="en-US" sz="1400" dirty="0">
-                <a:solidFill>
-                  <a:schemeClr val="tx2"/>
-                </a:solidFill>
-              </a:rPr>
-              <a:t>ЖИ лимиті → қосалқы модель</a:t>
-            </a:r>
-            <a:endParaRPr lang="en-US" sz="1400" dirty="0"/>
-          </a:p>
-        </p:txBody>
-      </p:sp>
-      <p:graphicFrame>
-        <p:nvGraphicFramePr>
-          <p:cNvPr id="6" name="score-chart" descr=""/>
-          <p:cNvGraphicFramePr/>
-          <p:nvPr/>
-        </p:nvGraphicFramePr>
-        <p:xfrm>
-          <a:off x="3749040" y="1051560"/>
-          <a:ext cx="4937760" cy="2743200"/>
-        </p:xfrm>
-        <a:graphic xmlns:a="http://schemas.openxmlformats.org/drawingml/2006/main">
-          <a:graphicData uri="http://schemas.openxmlformats.org/drawingml/2006/chart">
-            <c:chart xmlns:c="http://schemas.openxmlformats.org/drawingml/2006/chart" r:id="rId1"/>
-          </a:graphicData>
-        </a:graphic>
-      </p:graphicFrame>
-      <p:sp>
-        <p:nvSpPr>
-          <p:cNvPr id="7" name="pilot-metrics"/>
-          <p:cNvSpPr txBox="1"/>
-          <p:nvPr/>
-        </p:nvSpPr>
-        <p:spPr>
-          <a:xfrm>
-            <a:off x="3749040" y="3840480"/>
-            <a:ext cx="4937760" cy="731520"/>
-          </a:xfrm>
-          <a:prstGeom prst="rect">
-            <a:avLst/>
-          </a:prstGeom>
-          <a:noFill/>
-          <a:ln/>
-        </p:spPr>
-        <p:txBody>
-          <a:bodyPr wrap="square" lIns="0" tIns="0" rIns="0" bIns="0" rtlCol="0" anchor="t"/>
-          <a:lstStyle/>
-          <a:p>
-            <a:pPr indent="0" marL="0">
-              <a:buNone/>
-            </a:pPr>
-            <a:r>
-              <a:rPr lang="en-US" sz="1300" b="1" dirty="0">
-                <a:solidFill>
-                  <a:schemeClr val="tx1"/>
-                </a:solidFill>
-              </a:rPr>
-              <a:t>Толық сәйкестік: 11/14 · орташа айырма: 0.5 балл</a:t>
-            </a:r>
-            <a:endParaRPr lang="en-US" sz="1300" dirty="0"/>
-          </a:p>
-          <a:p>
-            <a:pPr indent="0" marL="0">
-              <a:buNone/>
-            </a:pPr>
-            <a:r>
-              <a:rPr lang="en-US" sz="1300" dirty="0">
-                <a:solidFill>
-                  <a:schemeClr val="tx2"/>
-                </a:solidFill>
-              </a:rPr>
-              <a:t>Айырмашылық тек даулы жауаптарда (R11, R13, R14): ЖИ баламалы шешімдерді төмен бағалады → сұраныс v2</a:t>
-            </a:r>
-            <a:endParaRPr lang="en-US" sz="1300" dirty="0"/>
           </a:p>
         </p:txBody>
       </p:sp>
@@ -4578,6 +4832,370 @@
             <a:r>
               <a:rPr lang="en-US" sz="3000" b="1" dirty="0">
                 <a:solidFill>
+                  <a:schemeClr val="tx1"/>
+                </a:solidFill>
+              </a:rPr>
+              <a:t>Сынақ нәтижелері</a:t>
+            </a:r>
+            <a:endParaRPr lang="en-US" sz="3000" dirty="0"/>
+          </a:p>
+        </p:txBody>
+      </p:sp>
+      <p:sp>
+        <p:nvSpPr>
+          <p:cNvPr id="3" name="tech-card"/>
+          <p:cNvSpPr/>
+          <p:nvPr/>
+        </p:nvSpPr>
+        <p:spPr>
+          <a:xfrm>
+            <a:off x="457200" y="1097280"/>
+            <a:ext cx="3017520" cy="3429000"/>
+          </a:xfrm>
+          <a:prstGeom prst="roundRect">
+            <a:avLst>
+              <a:gd name="adj" fmla="val 3030"/>
+            </a:avLst>
+          </a:prstGeom>
+          <a:solidFill>
+            <a:srgbClr val="F3F5F9"/>
+          </a:solidFill>
+          <a:ln/>
+        </p:spPr>
+      </p:sp>
+      <p:sp>
+        <p:nvSpPr>
+          <p:cNvPr id="4" name="tech-num"/>
+          <p:cNvSpPr txBox="1"/>
+          <p:nvPr/>
+        </p:nvSpPr>
+        <p:spPr>
+          <a:xfrm>
+            <a:off x="640080" y="1234440"/>
+            <a:ext cx="2651760" cy="868680"/>
+          </a:xfrm>
+          <a:prstGeom prst="rect">
+            <a:avLst/>
+          </a:prstGeom>
+          <a:noFill/>
+          <a:ln/>
+        </p:spPr>
+        <p:txBody>
+          <a:bodyPr wrap="square" lIns="0" tIns="0" rIns="0" bIns="0" rtlCol="0" anchor="ctr"/>
+          <a:lstStyle/>
+          <a:p>
+            <a:pPr indent="0" marL="0">
+              <a:buNone/>
+            </a:pPr>
+            <a:r>
+              <a:rPr lang="en-US" sz="4800" b="1" dirty="0">
+                <a:solidFill>
+                  <a:schemeClr val="accent3"/>
+                </a:solidFill>
+                <a:latin typeface="Cambria" pitchFamily="34" charset="0"/>
+                <a:ea typeface="Cambria" pitchFamily="34" charset="-122"/>
+                <a:cs typeface="Cambria" pitchFamily="34" charset="-120"/>
+              </a:rPr>
+              <a:t>16/16</a:t>
+            </a:r>
+            <a:endParaRPr lang="en-US" sz="4800" dirty="0"/>
+          </a:p>
+        </p:txBody>
+      </p:sp>
+      <p:sp>
+        <p:nvSpPr>
+          <p:cNvPr id="5" name="tech-list"/>
+          <p:cNvSpPr txBox="1"/>
+          <p:nvPr/>
+        </p:nvSpPr>
+        <p:spPr>
+          <a:xfrm>
+            <a:off x="640080" y="2148840"/>
+            <a:ext cx="2697480" cy="2286000"/>
+          </a:xfrm>
+          <a:prstGeom prst="rect">
+            <a:avLst/>
+          </a:prstGeom>
+          <a:noFill/>
+          <a:ln/>
+        </p:spPr>
+        <p:txBody>
+          <a:bodyPr wrap="square" lIns="0" tIns="0" rIns="0" bIns="0" rtlCol="0" anchor="t"/>
+          <a:lstStyle/>
+          <a:p>
+            <a:pPr indent="0" marL="0">
+              <a:spcAft>
+                <a:spcPts val="400"/>
+              </a:spcAft>
+              <a:buNone/>
+            </a:pPr>
+            <a:r>
+              <a:rPr lang="en-US" sz="1400" b="1" dirty="0">
+                <a:solidFill>
+                  <a:schemeClr val="tx1"/>
+                </a:solidFill>
+              </a:rPr>
+              <a:t>техникалық сынақ өтті</a:t>
+            </a:r>
+            <a:endParaRPr lang="en-US" sz="1400" dirty="0"/>
+          </a:p>
+          <a:p>
+            <a:pPr marL="342900" indent="-342900">
+              <a:spcAft>
+                <a:spcPts val="400"/>
+              </a:spcAft>
+              <a:buSzPct val="100000"/>
+              <a:buChar char="•"/>
+            </a:pPr>
+            <a:r>
+              <a:rPr lang="en-US" sz="1400" dirty="0">
+                <a:solidFill>
+                  <a:schemeClr val="tx2"/>
+                </a:solidFill>
+              </a:rPr>
+              <a:t>дұрыс және бос жауап</a:t>
+            </a:r>
+            <a:endParaRPr lang="en-US" sz="1400" dirty="0"/>
+          </a:p>
+          <a:p>
+            <a:pPr marL="342900" indent="-342900">
+              <a:spcAft>
+                <a:spcPts val="400"/>
+              </a:spcAft>
+              <a:buSzPct val="100000"/>
+              <a:buChar char="•"/>
+            </a:pPr>
+            <a:r>
+              <a:rPr lang="en-US" sz="1400" dirty="0">
+                <a:solidFill>
+                  <a:schemeClr val="tx2"/>
+                </a:solidFill>
+              </a:rPr>
+              <a:t>API қатесі, қайта жіберу</a:t>
+            </a:r>
+            <a:endParaRPr lang="en-US" sz="1400" dirty="0"/>
+          </a:p>
+          <a:p>
+            <a:pPr marL="342900" indent="-342900">
+              <a:spcAft>
+                <a:spcPts val="400"/>
+              </a:spcAft>
+              <a:buSzPct val="100000"/>
+              <a:buChar char="•"/>
+            </a:pPr>
+            <a:r>
+              <a:rPr lang="en-US" sz="1400" dirty="0">
+                <a:solidFill>
+                  <a:schemeClr val="tx2"/>
+                </a:solidFill>
+              </a:rPr>
+              <a:t>бұзылған JSON, балл аралығы</a:t>
+            </a:r>
+            <a:endParaRPr lang="en-US" sz="1400" dirty="0"/>
+          </a:p>
+          <a:p>
+            <a:pPr marL="342900" indent="-342900">
+              <a:spcAft>
+                <a:spcPts val="400"/>
+              </a:spcAft>
+              <a:buSzPct val="100000"/>
+              <a:buChar char="•"/>
+            </a:pPr>
+            <a:r>
+              <a:rPr lang="en-US" sz="1400" dirty="0">
+                <a:solidFill>
+                  <a:schemeClr val="tx2"/>
+                </a:solidFill>
+              </a:rPr>
+              <a:t>рұқсатсыз кіру, CSV экспорт</a:t>
+            </a:r>
+            <a:endParaRPr lang="en-US" sz="1400" dirty="0"/>
+          </a:p>
+          <a:p>
+            <a:pPr marL="342900" indent="-342900">
+              <a:spcAft>
+                <a:spcPts val="400"/>
+              </a:spcAft>
+              <a:buSzPct val="100000"/>
+              <a:buChar char="•"/>
+            </a:pPr>
+            <a:r>
+              <a:rPr lang="en-US" sz="1400" dirty="0">
+                <a:solidFill>
+                  <a:schemeClr val="tx2"/>
+                </a:solidFill>
+              </a:rPr>
+              <a:t>ЖИ лимиті → қосалқы модель</a:t>
+            </a:r>
+            <a:endParaRPr lang="en-US" sz="1400" dirty="0"/>
+          </a:p>
+        </p:txBody>
+      </p:sp>
+      <p:graphicFrame>
+        <p:nvGraphicFramePr>
+          <p:cNvPr id="6" name="score-chart" descr=""/>
+          <p:cNvGraphicFramePr/>
+          <p:nvPr/>
+        </p:nvGraphicFramePr>
+        <p:xfrm>
+          <a:off x="3749040" y="1051560"/>
+          <a:ext cx="4937760" cy="2743200"/>
+        </p:xfrm>
+        <a:graphic xmlns:a="http://schemas.openxmlformats.org/drawingml/2006/main">
+          <a:graphicData uri="http://schemas.openxmlformats.org/drawingml/2006/chart">
+            <c:chart xmlns:c="http://schemas.openxmlformats.org/drawingml/2006/chart" r:id="rId1"/>
+          </a:graphicData>
+        </a:graphic>
+      </p:graphicFrame>
+      <p:sp>
+        <p:nvSpPr>
+          <p:cNvPr id="7" name="pilot-metrics"/>
+          <p:cNvSpPr txBox="1"/>
+          <p:nvPr/>
+        </p:nvSpPr>
+        <p:spPr>
+          <a:xfrm>
+            <a:off x="3749040" y="3840480"/>
+            <a:ext cx="4937760" cy="731520"/>
+          </a:xfrm>
+          <a:prstGeom prst="rect">
+            <a:avLst/>
+          </a:prstGeom>
+          <a:noFill/>
+          <a:ln/>
+        </p:spPr>
+        <p:txBody>
+          <a:bodyPr wrap="square" lIns="0" tIns="0" rIns="0" bIns="0" rtlCol="0" anchor="t"/>
+          <a:lstStyle/>
+          <a:p>
+            <a:pPr indent="0" marL="0">
+              <a:buNone/>
+            </a:pPr>
+            <a:r>
+              <a:rPr lang="en-US" sz="1300" b="1" dirty="0">
+                <a:solidFill>
+                  <a:schemeClr val="tx1"/>
+                </a:solidFill>
+              </a:rPr>
+              <a:t>Толық сәйкестік: 11/14 · орташа айырма: 0.5 балл</a:t>
+            </a:r>
+            <a:endParaRPr lang="en-US" sz="1300" dirty="0"/>
+          </a:p>
+          <a:p>
+            <a:pPr indent="0" marL="0">
+              <a:buNone/>
+            </a:pPr>
+            <a:r>
+              <a:rPr lang="en-US" sz="1300" dirty="0">
+                <a:solidFill>
+                  <a:schemeClr val="tx2"/>
+                </a:solidFill>
+              </a:rPr>
+              <a:t>Айырмашылық тек даулы жауаптарда (R11, R13, R14): ЖИ баламалы шешімдерді төмен бағалады → сұраныс v2</a:t>
+            </a:r>
+            <a:endParaRPr lang="en-US" sz="1300" dirty="0"/>
+          </a:p>
+        </p:txBody>
+      </p:sp>
+      <p:sp>
+        <p:nvSpPr>
+          <p:cNvPr id="25" name="Slide Number Placeholder 0"/>
+          <p:cNvSpPr>
+            <a:spLocks noGrp="1"/>
+          </p:cNvSpPr>
+          <p:nvPr>
+            <p:ph type="sldNum" sz="quarter" idx="4294967295"/>
+          </p:nvPr>
+        </p:nvSpPr>
+        <p:spPr>
+          <a:xfrm>
+            <a:off x="8229600" y="4754880"/>
+            <a:ext cx="457200" cy="274320"/>
+          </a:xfrm>
+          <a:prstGeom prst="rect">
+            <a:avLst/>
+          </a:prstGeom>
+          <a:extLst>
+            <a:ext uri="{C572A759-6A51-4108-AA02-DFA0A04FC94B}">
+              <ma14:wrappingTextBoxFlag xmlns:ma14="http://schemas.microsoft.com/office/mac/drawingml/2011/main" val="0"/>
+            </a:ext>
+          </a:extLst>
+        </p:spPr>
+        <p:txBody>
+          <a:bodyPr/>
+          <a:lstStyle>
+            <a:lvl1pPr>
+              <a:defRPr sz="1000">
+                <a:solidFill>
+                  <a:srgbClr val="667085"/>
+                </a:solidFill>
+              </a:defRPr>
+            </a:lvl1pPr>
+          </a:lstStyle>
+          <a:p>
+            <a:pPr algn="r"/>
+            <a:fld id="{F7021451-1387-4CA6-816F-3879F97B5CBC}" type="slidenum">
+              <a:rPr b="0" lang="en-US"/>
+              <a:t>6</a:t>
+            </a:fld>
+            <a:endParaRPr lang="en-US"/>
+          </a:p>
+        </p:txBody>
+      </p:sp>
+    </p:spTree>
+  </p:cSld>
+  <p:clrMapOvr>
+    <a:masterClrMapping/>
+  </p:clrMapOvr>
+</p:sld>
+</file>
+
+<file path=ppt/slides/slide7.xml><?xml version="1.0" encoding="utf-8"?>
+<p:sld xmlns:a="http://schemas.openxmlformats.org/drawingml/2006/main" xmlns:r="http://schemas.openxmlformats.org/officeDocument/2006/relationships" xmlns:p="http://schemas.openxmlformats.org/presentationml/2006/main">
+  <p:cSld name="Slide 7">
+    <p:spTree>
+      <p:nvGrpSpPr>
+        <p:cNvPr id="1" name=""/>
+        <p:cNvGrpSpPr/>
+        <p:nvPr/>
+      </p:nvGrpSpPr>
+      <p:grpSpPr>
+        <a:xfrm>
+          <a:off x="0" y="0"/>
+          <a:ext cx="0" cy="0"/>
+          <a:chOff x="0" y="0"/>
+          <a:chExt cx="0" cy="0"/>
+        </a:xfrm>
+      </p:grpSpPr>
+      <p:sp>
+        <p:nvSpPr>
+          <p:cNvPr id="2" name="Text 0"/>
+          <p:cNvSpPr/>
+          <p:nvPr>
+            <p:ph idx="100" type="title" hasCustomPrompt="1"/>
+          </p:nvPr>
+        </p:nvSpPr>
+        <p:spPr>
+          <a:xfrm>
+            <a:off x="457200" y="274320"/>
+            <a:ext cx="8229600" cy="640080"/>
+          </a:xfrm>
+          <a:prstGeom prst="rect">
+            <a:avLst/>
+          </a:prstGeom>
+          <a:noFill/>
+          <a:ln/>
+        </p:spPr>
+        <p:txBody>
+          <a:bodyPr wrap="square" lIns="0" tIns="0" rIns="0" bIns="0" rtlCol="0" anchor="ctr"/>
+          <a:lstStyle/>
+          <a:p>
+            <a:pPr algn="l" indent="0" marL="0">
+              <a:buNone/>
+            </a:pPr>
+            <a:r>
+              <a:rPr lang="en-US" sz="3000" b="1" dirty="0">
+                <a:solidFill>
                   <a:schemeClr val="bg1"/>
                 </a:solidFill>
               </a:rPr>
@@ -5129,7 +5747,7 @@
             <a:pPr algn="r"/>
             <a:fld id="{F7021451-1387-4CA6-816F-3879F97B5CBC}" type="slidenum">
               <a:rPr b="0" lang="en-US"/>
-              <a:t>6</a:t>
+              <a:t>7</a:t>
             </a:fld>
             <a:endParaRPr lang="en-US"/>
           </a:p>

--- a/docs/Таныстырылым_1-аралық_жоба.pptx
+++ b/docs/Таныстырылым_1-аралық_жоба.pptx
@@ -113,29 +113,29 @@
   <p:extLst>
     <p:ext uri="{521415D9-36F7-43E2-AB2F-B90AF26B5E84}">
       <p14:sectionLst xmlns:p14="http://schemas.microsoft.com/office/powerpoint/2010/main">
-        <p14:section name="Кіріспе" id="{191b651f-71ab-97ab-f0c7-b87d1d805cc2}">
+        <p14:section name="Кіріспе" id="{b911d053-38fe-a0b4-369c-70a669718bb6}">
           <p14:sldIdLst>
             <p14:sldId id="256"/>
           </p14:sldIdLst>
         </p14:section>
-        <p14:section name="Зерттеу" id="{394efa51-5268-ab22-24b7-894d97082904}">
+        <p14:section name="Зерттеу" id="{946ace6d-1d98-235f-78bf-e97a37e0f3bc}">
           <p14:sldIdLst>
             <p14:sldId id="257"/>
           </p14:sldIdLst>
         </p14:section>
-        <p14:section name="Қосымша" id="{879ae49a-d686-f3af-7aa3-31bea4e38f3f}">
+        <p14:section name="Қосымша" id="{4ad7e7f9-ee60-a40b-59c0-353235f1cce0}">
           <p14:sldIdLst>
             <p14:sldId id="258"/>
             <p14:sldId id="259"/>
             <p14:sldId id="260"/>
           </p14:sldIdLst>
         </p14:section>
-        <p14:section name="Нәтижелер" id="{4a11d86c-ea4e-6934-88f8-43137a0eeb92}">
+        <p14:section name="Нәтижелер" id="{3558d1a3-ca33-15b4-aad9-17f94ffe63ac}">
           <p14:sldIdLst>
             <p14:sldId id="261"/>
           </p14:sldIdLst>
         </p14:section>
-        <p14:section name="Қорытынды" id="{a6690735-c9bb-9f57-a9f0-583d361635a9}">
+        <p14:section name="Қорытынды" id="{89e1733f-2e32-4a28-1647-d796fbf63855}">
           <p14:sldIdLst>
             <p14:sldId id="262"/>
           </p14:sldIdLst>
@@ -2722,7 +2722,7 @@
                   <a:schemeClr val="tx2"/>
                 </a:solidFill>
               </a:rPr>
-              <a:t>Білім алушылар массивтермен, циклдермен және DOM оқиғаларымен жұмыс істеуге арналған тапсырмаларда қандай қателер жібереді және ЖИ кері байланысы оларды педагог бағасымен салыстырғанда қаншалықты дұрыс анықтайды?</a:t>
+              <a:t>Білім алушылар JS тапсырмаларында қандай қателер жібереді, ЖИ оларды педагогпен салыстырғанда қаншалықты дұрыс анықтайды және деңгейлік тапсырмадан кейін деңгейі өзгере ме?</a:t>
             </a:r>
             <a:endParaRPr lang="en-US" sz="1600" dirty="0"/>
           </a:p>
@@ -2783,7 +2783,7 @@
                 <a:ea typeface="Cambria" pitchFamily="34" charset="-122"/>
                 <a:cs typeface="Cambria" pitchFamily="34" charset="-120"/>
               </a:rPr>
-              <a:t>10</a:t>
+              <a:t>20</a:t>
             </a:r>
             <a:endParaRPr lang="en-US" sz="3400" dirty="0"/>
           </a:p>
@@ -2819,7 +2819,7 @@
                   <a:schemeClr val="tx2"/>
                 </a:solidFill>
               </a:rPr>
-              <a:t>сұрақтық диагностикалық тест</a:t>
+              <a:t>сұрақ: диагностикалық + қорытынды тест</a:t>
             </a:r>
             <a:endParaRPr lang="en-US" sz="1300" dirty="0"/>
           </a:p>
@@ -2880,7 +2880,7 @@
                 <a:ea typeface="Cambria" pitchFamily="34" charset="-122"/>
                 <a:cs typeface="Cambria" pitchFamily="34" charset="-120"/>
               </a:rPr>
-              <a:t>3</a:t>
+              <a:t>3 × 5</a:t>
             </a:r>
             <a:endParaRPr lang="en-US" sz="3400" dirty="0"/>
           </a:p>
@@ -2916,7 +2916,7 @@
                   <a:schemeClr val="tx2"/>
                 </a:solidFill>
               </a:rPr>
-              <a:t>практикалық тапсырма (код + түсіндірме)</a:t>
+              <a:t>деңгей × тапсырма банкі, ЖИ таңдайды</a:t>
             </a:r>
             <a:endParaRPr lang="en-US" sz="1300" dirty="0"/>
           </a:p>
@@ -3406,7 +3406,7 @@
                   <a:schemeClr val="tx1"/>
                 </a:solidFill>
               </a:rPr>
-              <a:t>Жауап енгізу</a:t>
+              <a:t>Тест → деңгей</a:t>
             </a:r>
             <a:endParaRPr lang="en-US" sz="1300" dirty="0"/>
           </a:p>
@@ -3509,7 +3509,7 @@
                   <a:schemeClr val="tx1"/>
                 </a:solidFill>
               </a:rPr>
-              <a:t>Бұлтқа сақтау</a:t>
+              <a:t>ЖИ тапсырма таңдайды</a:t>
             </a:r>
             <a:endParaRPr lang="en-US" sz="1300" dirty="0"/>
           </a:p>
@@ -3612,7 +3612,7 @@
                   <a:schemeClr val="tx1"/>
                 </a:solidFill>
               </a:rPr>
-              <a:t>Gemini: рубрика бойынша талдау</a:t>
+              <a:t>Жауап → бұлт</a:t>
             </a:r>
             <a:endParaRPr lang="en-US" sz="1300" dirty="0"/>
           </a:p>
@@ -3715,7 +3715,7 @@
                   <a:schemeClr val="tx1"/>
                 </a:solidFill>
               </a:rPr>
-              <a:t>JSON мен балды тексеру</a:t>
+              <a:t>ЖИ: рубрика бойынша талдау</a:t>
             </a:r>
             <a:endParaRPr lang="en-US" sz="1300" dirty="0"/>
           </a:p>
@@ -3897,7 +3897,7 @@
                   <a:schemeClr val="tx1"/>
                 </a:solidFill>
               </a:rPr>
-              <a:t>CSV экспорт</a:t>
+              <a:t>Қорытынды тест</a:t>
             </a:r>
             <a:endParaRPr lang="en-US" sz="1300" dirty="0"/>
           </a:p>
@@ -4896,7 +4896,7 @@
                 <a:ea typeface="Cambria" pitchFamily="34" charset="-122"/>
                 <a:cs typeface="Cambria" pitchFamily="34" charset="-120"/>
               </a:rPr>
-              <a:t>16/16</a:t>
+              <a:t>40/40</a:t>
             </a:r>
             <a:endParaRPr lang="en-US" sz="4800" dirty="0"/>
           </a:p>
@@ -5026,6 +5026,24 @@
                 </a:solidFill>
               </a:rPr>
               <a:t>ЖИ лимиті → қосалқы модель</a:t>
+            </a:r>
+            <a:endParaRPr lang="en-US" sz="1400" dirty="0"/>
+          </a:p>
+          <a:p>
+            <a:pPr marL="342900" indent="-342900">
+              <a:spcAft>
+                <a:spcPts val="400"/>
+              </a:spcAft>
+              <a:buSzPct val="100000"/>
+              <a:buChar char="•"/>
+            </a:pPr>
+            <a:r>
+              <a:rPr lang="en-US" sz="1400" dirty="0">
+                <a:solidFill>
+                  <a:schemeClr val="tx2"/>
+                </a:solidFill>
+              </a:rPr>
+              <a:t>деңгей, бұғаттау, қорытынды тест</a:t>
             </a:r>
             <a:endParaRPr lang="en-US" sz="1400" dirty="0"/>
           </a:p>
